--- a/classes/parte-0-fundamentos-y-prerrequisitos/002-el-panorama-de-amenazas-moderno-actores-motivaciones-y-cyber-kill-chain/clase-002-presentacion.pptx
+++ b/classes/parte-0-fundamentos-y-prerrequisitos/002-el-panorama-de-amenazas-moderno-actores-motivaciones-y-cyber-kill-chain/clase-002-presentacion.pptx
@@ -17,6 +17,10 @@
     <p:sldId id="265" r:id="rId16"/>
     <p:sldId id="266" r:id="rId17"/>
     <p:sldId id="267" r:id="rId18"/>
+    <p:sldId id="268" r:id="rId19"/>
+    <p:sldId id="269" r:id="rId20"/>
+    <p:sldId id="270" r:id="rId21"/>
+    <p:sldId id="271" r:id="rId22"/>
   </p:sldIdLst>
   <p:sldSz cx="9144000" cy="6858000" type="screen4x3"/>
   <p:notesSz cx="6858000" cy="9144000"/>
@@ -3198,7 +3202,7 @@
                   <a:srgbClr val="0B3D2E"/>
                 </a:solidFill>
               </a:rPr>
-              <a:t>⚠️ Errores comunes</a:t>
+              <a:t>✍️ Ejercicios</a:t>
             </a:r>
           </a:p>
         </p:txBody>
@@ -3236,67 +3240,97 @@
                   <a:srgbClr val="22282E"/>
                 </a:solidFill>
               </a:rPr>
-              <a:t>•  Llamar "APT" a cualquier ataque — APT implica persistencia y recursos altos; la mayoría de ataques son oportunistas. Reserva el término.</a:t>
-            </a:r>
-          </a:p>
-          <a:p>
-            <a:pPr>
-              <a:spcAft>
-                <a:spcPts val="600"/>
-              </a:spcAft>
-            </a:pPr>
-            <a:r>
-              <a:rPr sz="1500">
-                <a:solidFill>
-                  <a:srgbClr val="22282E"/>
-                </a:solidFill>
-              </a:rPr>
-              <a:t>•  Bloquear solo IoC y sentirse seguro — Los IoC rotan en horas; caza también por TTP y comportamiento.</a:t>
-            </a:r>
-          </a:p>
-          <a:p>
-            <a:pPr>
-              <a:spcAft>
-                <a:spcPts val="600"/>
-              </a:spcAft>
-            </a:pPr>
-            <a:r>
-              <a:rPr sz="1500">
-                <a:solidFill>
-                  <a:srgbClr val="22282E"/>
-                </a:solidFill>
-              </a:rPr>
-              <a:t>•  Ver la Kill Chain como lineal e inviolable — Los ataques modernos iteran y saltan fases; úsala como guía, no como dogma.</a:t>
-            </a:r>
-          </a:p>
-          <a:p>
-            <a:pPr>
-              <a:spcAft>
-                <a:spcPts val="600"/>
-              </a:spcAft>
-            </a:pPr>
-            <a:r>
-              <a:rPr sz="1500">
-                <a:solidFill>
-                  <a:srgbClr val="22282E"/>
-                </a:solidFill>
-              </a:rPr>
-              <a:t>•  Ignorar el insider threat — No todo ataque viene de fuera; controles internos y segregación de funciones importan.</a:t>
-            </a:r>
-          </a:p>
-          <a:p>
-            <a:pPr>
-              <a:spcAft>
-                <a:spcPts val="600"/>
-              </a:spcAft>
-            </a:pPr>
-            <a:r>
-              <a:rPr sz="1500">
-                <a:solidFill>
-                  <a:srgbClr val="22282E"/>
-                </a:solidFill>
-              </a:rPr>
-              <a:t>•  Confundir motivación con capacidad — Un actor muy motivado puede ser poco capaz y viceversa; evalúa ambas.</a:t>
+              <a:t>•  Ordena de menor a mayor sofisticación: hacktivista, script kiddie, APT estatal, insider malicioso, y justifica el orden con los dos ejes.</a:t>
+            </a:r>
+          </a:p>
+          <a:p>
+            <a:pPr>
+              <a:spcAft>
+                <a:spcPts val="600"/>
+              </a:spcAft>
+            </a:pPr>
+            <a:r>
+              <a:rPr sz="1500">
+                <a:solidFill>
+                  <a:srgbClr val="22282E"/>
+                </a:solidFill>
+              </a:rPr>
+              <a:t>•  Explica por qué romper la cadena en la fase de entrega es más barato que hacerlo en "acciones sobre objetivos".</a:t>
+            </a:r>
+          </a:p>
+          <a:p>
+            <a:pPr>
+              <a:spcAft>
+                <a:spcPts val="600"/>
+              </a:spcAft>
+            </a:pPr>
+            <a:r>
+              <a:rPr sz="1500">
+                <a:solidFill>
+                  <a:srgbClr val="22282E"/>
+                </a:solidFill>
+              </a:rPr>
+              <a:t>•  Da un ejemplo de IoC y uno de TTP para una campaña de phishing, y sitúalos en la pirámide del dolor.</a:t>
+            </a:r>
+          </a:p>
+          <a:p>
+            <a:pPr>
+              <a:spcAft>
+                <a:spcPts val="600"/>
+              </a:spcAft>
+            </a:pPr>
+            <a:r>
+              <a:rPr sz="1500">
+                <a:solidFill>
+                  <a:srgbClr val="22282E"/>
+                </a:solidFill>
+              </a:rPr>
+              <a:t>•  Contrasta la motivación de un grupo de ransomware con la de una APT estatal: ¿qué objetivos persiguen y cómo cambia eso su comportamiento?</a:t>
+            </a:r>
+          </a:p>
+          <a:p>
+            <a:pPr>
+              <a:spcAft>
+                <a:spcPts val="600"/>
+              </a:spcAft>
+            </a:pPr>
+            <a:r>
+              <a:rPr sz="1500">
+                <a:solidFill>
+                  <a:srgbClr val="22282E"/>
+                </a:solidFill>
+              </a:rPr>
+              <a:t>•  Investiga un grupo APT documentado en ATT&amp;CK y resume sus TTP principales con al menos dos IDs de técnica.</a:t>
+            </a:r>
+          </a:p>
+          <a:p>
+            <a:pPr>
+              <a:spcAft>
+                <a:spcPts val="600"/>
+              </a:spcAft>
+            </a:pPr>
+            <a:r>
+              <a:rPr sz="1500">
+                <a:solidFill>
+                  <a:srgbClr val="22282E"/>
+                </a:solidFill>
+              </a:rPr>
+              <a:t>•  Diseña una tabla de detección propia: fase de la Kill Chain → señal observable → herramienta que la capta.</a:t>
+            </a:r>
+          </a:p>
+          <a:p>
+            <a:pPr>
+              <a:spcAft>
+                <a:spcPts val="600"/>
+              </a:spcAft>
+            </a:pPr>
+            <a:r>
+              <a:rPr sz="1500">
+                <a:solidFill>
+                  <a:srgbClr val="22282E"/>
+                </a:solidFill>
+              </a:rPr>
+              <a:t>•  Argumenta por qué un programa que solo bloquea IoC queda desactualizado en horas y qué añadirías para una defensa duradera.</a:t>
             </a:r>
           </a:p>
         </p:txBody>
@@ -3347,7 +3381,7 @@
                   <a:srgbClr val="0B3D2E"/>
                 </a:solidFill>
               </a:rPr>
-              <a:t>❓ Preguntas frecuentes</a:t>
+              <a:t>📝 Reto verificable</a:t>
             </a:r>
           </a:p>
         </p:txBody>
@@ -3385,52 +3419,22 @@
                   <a:srgbClr val="22282E"/>
                 </a:solidFill>
               </a:rPr>
-              <a:t>•  ❓ ¿La Kill Chain de Lockheed sigue vigente frente a ATT&amp;CK? Sí, son complementarias: la Kill Chain da la vista macro por fases; ATT&amp;CK detalla las técnicas concretas dentro de cada fase.</a:t>
-            </a:r>
-          </a:p>
-          <a:p>
-            <a:pPr>
-              <a:spcAft>
-                <a:spcPts val="600"/>
-              </a:spcAft>
-            </a:pPr>
-            <a:r>
-              <a:rPr sz="1500">
-                <a:solidFill>
-                  <a:srgbClr val="22282E"/>
-                </a:solidFill>
-              </a:rPr>
-              <a:t>•  ❓ ¿Por qué el ransomware es tan común hoy? Porque el modelo RaaS bajó la barrera de entrada y la doble extorsión (cifrar + filtrar) aumentó la presión de pago.</a:t>
-            </a:r>
-          </a:p>
-          <a:p>
-            <a:pPr>
-              <a:spcAft>
-                <a:spcPts val="600"/>
-              </a:spcAft>
-            </a:pPr>
-            <a:r>
-              <a:rPr sz="1500">
-                <a:solidFill>
-                  <a:srgbClr val="22282E"/>
-                </a:solidFill>
-              </a:rPr>
-              <a:t>•  ❓ ¿Threat intelligence es solo para grandes empresas? No. Incluso una pyme puede consumir feeds gratuitos (CISA KEV, OTX) para priorizar parches sobre lo que se explota activamente.</a:t>
-            </a:r>
-          </a:p>
-          <a:p>
-            <a:pPr>
-              <a:spcAft>
-                <a:spcPts val="600"/>
-              </a:spcAft>
-            </a:pPr>
-            <a:r>
-              <a:rPr sz="1500">
-                <a:solidFill>
-                  <a:srgbClr val="22282E"/>
-                </a:solidFill>
-              </a:rPr>
-              <a:t>•  ❓ ¿Un insider siempre es malicioso? No: muchos incidentes internos son negligentes (clic en phishing, mala configuración), no intencionados. Ambos requieren control.</a:t>
+              <a:t>•  Elabora un informe de una página tipo threat profile sobre un actor o campaña real: incluye clasificación del actor en los dos ejes, mapeo completo de la Kill Chain, al menos 5 técnicas ATT&amp;CK con…</a:t>
+            </a:r>
+          </a:p>
+          <a:p>
+            <a:pPr>
+              <a:spcAft>
+                <a:spcPts val="600"/>
+              </a:spcAft>
+            </a:pPr>
+            <a:r>
+              <a:rPr sz="1500">
+                <a:solidFill>
+                  <a:srgbClr val="22282E"/>
+                </a:solidFill>
+              </a:rPr>
+              <a:t>•  Criterio de aceptación: cada técnica citada existe en la matriz oficial de ATT&amp;CK con su ID verificable contra attack.mitre.org, y cada fase de la Kill Chain tiene al menos un control defensivo…</a:t>
             </a:r>
           </a:p>
         </p:txBody>
@@ -3481,7 +3485,7 @@
                   <a:srgbClr val="0B3D2E"/>
                 </a:solidFill>
               </a:rPr>
-              <a:t>🔗 Referencias</a:t>
+              <a:t>⚠️ Errores comunes</a:t>
             </a:r>
           </a:p>
         </p:txBody>
@@ -3519,6 +3523,319 @@
                   <a:srgbClr val="22282E"/>
                 </a:solidFill>
               </a:rPr>
+              <a:t>•  Llamar "APT" a cualquier ataque — APT implica persistencia y recursos altos; la mayoría de ataques son oportunistas. Reserva el término para lo que lo merece.</a:t>
+            </a:r>
+          </a:p>
+          <a:p>
+            <a:pPr>
+              <a:spcAft>
+                <a:spcPts val="600"/>
+              </a:spcAft>
+            </a:pPr>
+            <a:r>
+              <a:rPr sz="1500">
+                <a:solidFill>
+                  <a:srgbClr val="22282E"/>
+                </a:solidFill>
+              </a:rPr>
+              <a:t>•  Bloquear solo IoC y sentirse seguro — Los IoC rotan en horas; caza también por TTP y comportamiento, más arriba en la pirámide del dolor.</a:t>
+            </a:r>
+          </a:p>
+          <a:p>
+            <a:pPr>
+              <a:spcAft>
+                <a:spcPts val="600"/>
+              </a:spcAft>
+            </a:pPr>
+            <a:r>
+              <a:rPr sz="1500">
+                <a:solidFill>
+                  <a:srgbClr val="22282E"/>
+                </a:solidFill>
+              </a:rPr>
+              <a:t>•  Ver la Kill Chain como lineal e inviolable — Los ataques modernos iteran, saltan fases y compran accesos; úsala como guía, no como dogma.</a:t>
+            </a:r>
+          </a:p>
+          <a:p>
+            <a:pPr>
+              <a:spcAft>
+                <a:spcPts val="600"/>
+              </a:spcAft>
+            </a:pPr>
+            <a:r>
+              <a:rPr sz="1500">
+                <a:solidFill>
+                  <a:srgbClr val="22282E"/>
+                </a:solidFill>
+              </a:rPr>
+              <a:t>•  Ignorar el insider threat — No todo ataque viene de fuera; los controles internos y la segregación de funciones importan tanto como el perímetro.</a:t>
+            </a:r>
+          </a:p>
+          <a:p>
+            <a:pPr>
+              <a:spcAft>
+                <a:spcPts val="600"/>
+              </a:spcAft>
+            </a:pPr>
+            <a:r>
+              <a:rPr sz="1500">
+                <a:solidFill>
+                  <a:srgbClr val="22282E"/>
+                </a:solidFill>
+              </a:rPr>
+              <a:t>•  Confundir motivación con capacidad — Un actor muy motivado puede ser poco capaz y viceversa; evalúa ambos ejes por separado.</a:t>
+            </a:r>
+          </a:p>
+          <a:p>
+            <a:pPr>
+              <a:spcAft>
+                <a:spcPts val="600"/>
+              </a:spcAft>
+            </a:pPr>
+            <a:r>
+              <a:rPr sz="1500">
+                <a:solidFill>
+                  <a:srgbClr val="22282E"/>
+                </a:solidFill>
+              </a:rPr>
+              <a:t>•  Pagar el rescate confiando en recuperar todo — La doble extorsión mantiene la amenaza aunque descifres; la prevención y los backups probados son la única salida fiable.</a:t>
+            </a:r>
+          </a:p>
+        </p:txBody>
+      </p:sp>
+    </p:spTree>
+  </p:cSld>
+  <p:clrMapOvr>
+    <a:masterClrMapping/>
+  </p:clrMapOvr>
+</p:sld>
+</file>
+
+<file path=ppt/slides/slide13.xml><?xml version="1.0" encoding="utf-8"?>
+<p:sld xmlns:a="http://schemas.openxmlformats.org/drawingml/2006/main" xmlns:p="http://schemas.openxmlformats.org/presentationml/2006/main" xmlns:r="http://schemas.openxmlformats.org/officeDocument/2006/relationships">
+  <p:cSld>
+    <p:spTree>
+      <p:nvGrpSpPr>
+        <p:cNvPr id="1" name=""/>
+        <p:cNvGrpSpPr/>
+        <p:nvPr/>
+      </p:nvGrpSpPr>
+      <p:grpSpPr/>
+      <p:sp>
+        <p:nvSpPr>
+          <p:cNvPr id="2" name="TextBox 1"/>
+          <p:cNvSpPr txBox="1"/>
+          <p:nvPr/>
+        </p:nvSpPr>
+        <p:spPr>
+          <a:xfrm>
+            <a:off x="457200" y="320040"/>
+            <a:ext cx="8229600" cy="822960"/>
+          </a:xfrm>
+          <a:prstGeom prst="rect">
+            <a:avLst/>
+          </a:prstGeom>
+          <a:noFill/>
+        </p:spPr>
+        <p:txBody>
+          <a:bodyPr wrap="square">
+            <a:spAutoFit/>
+          </a:bodyPr>
+          <a:lstStyle/>
+          <a:p>
+            <a:r>
+              <a:rPr sz="2600" b="1">
+                <a:solidFill>
+                  <a:srgbClr val="0B3D2E"/>
+                </a:solidFill>
+              </a:rPr>
+              <a:t>❓ Preguntas frecuentes</a:t>
+            </a:r>
+          </a:p>
+        </p:txBody>
+      </p:sp>
+      <p:sp>
+        <p:nvSpPr>
+          <p:cNvPr id="3" name="TextBox 2"/>
+          <p:cNvSpPr txBox="1"/>
+          <p:nvPr/>
+        </p:nvSpPr>
+        <p:spPr>
+          <a:xfrm>
+            <a:off x="457200" y="1280160"/>
+            <a:ext cx="8229600" cy="4937760"/>
+          </a:xfrm>
+          <a:prstGeom prst="rect">
+            <a:avLst/>
+          </a:prstGeom>
+          <a:noFill/>
+        </p:spPr>
+        <p:txBody>
+          <a:bodyPr wrap="square">
+            <a:spAutoFit/>
+          </a:bodyPr>
+          <a:lstStyle/>
+          <a:p>
+            <a:pPr>
+              <a:spcAft>
+                <a:spcPts val="600"/>
+              </a:spcAft>
+            </a:pPr>
+            <a:r>
+              <a:rPr sz="1500">
+                <a:solidFill>
+                  <a:srgbClr val="22282E"/>
+                </a:solidFill>
+              </a:rPr>
+              <a:t>•  ❓ ¿La Kill Chain de Lockheed sigue vigente frente a ATT&amp;CK? Sí, son complementarias: la Kill Chain aporta la vista macro por fases y ATT&amp;CK detalla las técnicas concretas dentro de cada fase. Se usan…</a:t>
+            </a:r>
+          </a:p>
+          <a:p>
+            <a:pPr>
+              <a:spcAft>
+                <a:spcPts val="600"/>
+              </a:spcAft>
+            </a:pPr>
+            <a:r>
+              <a:rPr sz="1500">
+                <a:solidFill>
+                  <a:srgbClr val="22282E"/>
+                </a:solidFill>
+              </a:rPr>
+              <a:t>•  ❓ ¿Por qué el ransomware es tan común hoy? Porque el modelo RaaS bajó la barrera de entrada al alquilar el malware, y la doble extorsión (cifrar más filtrar) aumentó la presión de pago incluso sobre…</a:t>
+            </a:r>
+          </a:p>
+          <a:p>
+            <a:pPr>
+              <a:spcAft>
+                <a:spcPts val="600"/>
+              </a:spcAft>
+            </a:pPr>
+            <a:r>
+              <a:rPr sz="1500">
+                <a:solidFill>
+                  <a:srgbClr val="22282E"/>
+                </a:solidFill>
+              </a:rPr>
+              <a:t>•  ❓ ¿La threat intelligence es solo para grandes empresas? No. Incluso una pyme puede consumir feeds gratuitos como CISA KEV u OTX para priorizar parches sobre lo que de verdad se está explotando, que…</a:t>
+            </a:r>
+          </a:p>
+          <a:p>
+            <a:pPr>
+              <a:spcAft>
+                <a:spcPts val="600"/>
+              </a:spcAft>
+            </a:pPr>
+            <a:r>
+              <a:rPr sz="1500">
+                <a:solidFill>
+                  <a:srgbClr val="22282E"/>
+                </a:solidFill>
+              </a:rPr>
+              <a:t>•  ❓ ¿Un insider siempre es malicioso? No: muchos incidentes internos son negligentes (un clic en phishing, una mala configuración), no intencionados. Ambos casos requieren control, y la mayoría de las…</a:t>
+            </a:r>
+          </a:p>
+          <a:p>
+            <a:pPr>
+              <a:spcAft>
+                <a:spcPts val="600"/>
+              </a:spcAft>
+            </a:pPr>
+            <a:r>
+              <a:rPr sz="1500">
+                <a:solidFill>
+                  <a:srgbClr val="22282E"/>
+                </a:solidFill>
+              </a:rPr>
+              <a:t>•  ❓ ¿Qué gano distinguiendo IoC de TTP en la práctica? Ganas durabilidad en la detección: bloquear un TTP obliga al atacante a rediseñar su forma de operar, mientras que bloquear un IoC solo le cuesta…</a:t>
+            </a:r>
+          </a:p>
+        </p:txBody>
+      </p:sp>
+    </p:spTree>
+  </p:cSld>
+  <p:clrMapOvr>
+    <a:masterClrMapping/>
+  </p:clrMapOvr>
+</p:sld>
+</file>
+
+<file path=ppt/slides/slide14.xml><?xml version="1.0" encoding="utf-8"?>
+<p:sld xmlns:a="http://schemas.openxmlformats.org/drawingml/2006/main" xmlns:p="http://schemas.openxmlformats.org/presentationml/2006/main" xmlns:r="http://schemas.openxmlformats.org/officeDocument/2006/relationships">
+  <p:cSld>
+    <p:spTree>
+      <p:nvGrpSpPr>
+        <p:cNvPr id="1" name=""/>
+        <p:cNvGrpSpPr/>
+        <p:nvPr/>
+      </p:nvGrpSpPr>
+      <p:grpSpPr/>
+      <p:sp>
+        <p:nvSpPr>
+          <p:cNvPr id="2" name="TextBox 1"/>
+          <p:cNvSpPr txBox="1"/>
+          <p:nvPr/>
+        </p:nvSpPr>
+        <p:spPr>
+          <a:xfrm>
+            <a:off x="457200" y="320040"/>
+            <a:ext cx="8229600" cy="822960"/>
+          </a:xfrm>
+          <a:prstGeom prst="rect">
+            <a:avLst/>
+          </a:prstGeom>
+          <a:noFill/>
+        </p:spPr>
+        <p:txBody>
+          <a:bodyPr wrap="square">
+            <a:spAutoFit/>
+          </a:bodyPr>
+          <a:lstStyle/>
+          <a:p>
+            <a:r>
+              <a:rPr sz="2600" b="1">
+                <a:solidFill>
+                  <a:srgbClr val="0B3D2E"/>
+                </a:solidFill>
+              </a:rPr>
+              <a:t>🔗 Referencias</a:t>
+            </a:r>
+          </a:p>
+        </p:txBody>
+      </p:sp>
+      <p:sp>
+        <p:nvSpPr>
+          <p:cNvPr id="3" name="TextBox 2"/>
+          <p:cNvSpPr txBox="1"/>
+          <p:nvPr/>
+        </p:nvSpPr>
+        <p:spPr>
+          <a:xfrm>
+            <a:off x="457200" y="1280160"/>
+            <a:ext cx="8229600" cy="4937760"/>
+          </a:xfrm>
+          <a:prstGeom prst="rect">
+            <a:avLst/>
+          </a:prstGeom>
+          <a:noFill/>
+        </p:spPr>
+        <p:txBody>
+          <a:bodyPr wrap="square">
+            <a:spAutoFit/>
+          </a:bodyPr>
+          <a:lstStyle/>
+          <a:p>
+            <a:pPr>
+              <a:spcAft>
+                <a:spcPts val="600"/>
+              </a:spcAft>
+            </a:pPr>
+            <a:r>
+              <a:rPr sz="1500">
+                <a:solidFill>
+                  <a:srgbClr val="22282E"/>
+                </a:solidFill>
+              </a:rPr>
               <a:t>•  Lockheed Martin, Cyber Kill Chain — &lt;https://www.lockheedmartin.com/en-us/capabilities/cyber/cyber-kill-chain.html&gt;</a:t>
             </a:r>
           </a:p>
@@ -3567,8 +3884,173 @@
               <a:t>•  Verizon Data Breach Investigations Report (DBIR) — &lt;https://www.verizon.com/business/resources/reports/dbir/&gt;</a:t>
             </a:r>
           </a:p>
-        </p:txBody>
-      </p:sp>
+          <a:p>
+            <a:pPr>
+              <a:spcAft>
+                <a:spcPts val="600"/>
+              </a:spcAft>
+            </a:pPr>
+            <a:r>
+              <a:rPr sz="1500">
+                <a:solidFill>
+                  <a:srgbClr val="22282E"/>
+                </a:solidFill>
+              </a:rPr>
+              <a:t>•  ENISA Threat Landscape — &lt;https://www.enisa.europa.eu/topics/cyber-threats/threats-and-trends&gt;</a:t>
+            </a:r>
+          </a:p>
+        </p:txBody>
+      </p:sp>
+    </p:spTree>
+  </p:cSld>
+  <p:clrMapOvr>
+    <a:masterClrMapping/>
+  </p:clrMapOvr>
+</p:sld>
+</file>
+
+<file path=ppt/slides/slide15.xml><?xml version="1.0" encoding="utf-8"?>
+<p:sld xmlns:a="http://schemas.openxmlformats.org/drawingml/2006/main" xmlns:p="http://schemas.openxmlformats.org/presentationml/2006/main" xmlns:r="http://schemas.openxmlformats.org/officeDocument/2006/relationships">
+  <p:cSld>
+    <p:spTree>
+      <p:nvGrpSpPr>
+        <p:cNvPr id="1" name=""/>
+        <p:cNvGrpSpPr/>
+        <p:nvPr/>
+      </p:nvGrpSpPr>
+      <p:grpSpPr/>
+      <p:sp>
+        <p:nvSpPr>
+          <p:cNvPr id="2" name="TextBox 1"/>
+          <p:cNvSpPr txBox="1"/>
+          <p:nvPr/>
+        </p:nvSpPr>
+        <p:spPr>
+          <a:xfrm>
+            <a:off x="457200" y="274320"/>
+            <a:ext cx="8229600" cy="640080"/>
+          </a:xfrm>
+          <a:prstGeom prst="rect">
+            <a:avLst/>
+          </a:prstGeom>
+          <a:noFill/>
+        </p:spPr>
+        <p:txBody>
+          <a:bodyPr wrap="square">
+            <a:spAutoFit/>
+          </a:bodyPr>
+          <a:lstStyle/>
+          <a:p>
+            <a:r>
+              <a:rPr sz="2200" b="1">
+                <a:solidFill>
+                  <a:srgbClr val="0B3D2E"/>
+                </a:solidFill>
+              </a:rPr>
+              <a:t>Diagrama 1</a:t>
+            </a:r>
+          </a:p>
+        </p:txBody>
+      </p:sp>
+      <p:pic>
+        <p:nvPicPr>
+          <p:cNvPr id="3" name="Picture 2" descr="e6c290e0030d4c33.png"/>
+          <p:cNvPicPr>
+            <a:picLocks noChangeAspect="1"/>
+          </p:cNvPicPr>
+          <p:nvPr/>
+        </p:nvPicPr>
+        <p:blipFill>
+          <a:blip r:embed="rId2"/>
+          <a:stretch>
+            <a:fillRect/>
+          </a:stretch>
+        </p:blipFill>
+        <p:spPr>
+          <a:xfrm>
+            <a:off x="1920240" y="1097280"/>
+            <a:ext cx="5303520" cy="5303520"/>
+          </a:xfrm>
+          <a:prstGeom prst="rect">
+            <a:avLst/>
+          </a:prstGeom>
+        </p:spPr>
+      </p:pic>
+    </p:spTree>
+  </p:cSld>
+  <p:clrMapOvr>
+    <a:masterClrMapping/>
+  </p:clrMapOvr>
+</p:sld>
+</file>
+
+<file path=ppt/slides/slide16.xml><?xml version="1.0" encoding="utf-8"?>
+<p:sld xmlns:a="http://schemas.openxmlformats.org/drawingml/2006/main" xmlns:p="http://schemas.openxmlformats.org/presentationml/2006/main" xmlns:r="http://schemas.openxmlformats.org/officeDocument/2006/relationships">
+  <p:cSld>
+    <p:spTree>
+      <p:nvGrpSpPr>
+        <p:cNvPr id="1" name=""/>
+        <p:cNvGrpSpPr/>
+        <p:nvPr/>
+      </p:nvGrpSpPr>
+      <p:grpSpPr/>
+      <p:sp>
+        <p:nvSpPr>
+          <p:cNvPr id="2" name="TextBox 1"/>
+          <p:cNvSpPr txBox="1"/>
+          <p:nvPr/>
+        </p:nvSpPr>
+        <p:spPr>
+          <a:xfrm>
+            <a:off x="457200" y="274320"/>
+            <a:ext cx="8229600" cy="640080"/>
+          </a:xfrm>
+          <a:prstGeom prst="rect">
+            <a:avLst/>
+          </a:prstGeom>
+          <a:noFill/>
+        </p:spPr>
+        <p:txBody>
+          <a:bodyPr wrap="square">
+            <a:spAutoFit/>
+          </a:bodyPr>
+          <a:lstStyle/>
+          <a:p>
+            <a:r>
+              <a:rPr sz="2200" b="1">
+                <a:solidFill>
+                  <a:srgbClr val="0B3D2E"/>
+                </a:solidFill>
+              </a:rPr>
+              <a:t>Diagrama 2</a:t>
+            </a:r>
+          </a:p>
+        </p:txBody>
+      </p:sp>
+      <p:pic>
+        <p:nvPicPr>
+          <p:cNvPr id="3" name="Picture 2" descr="ae8a05867d1352ec.png"/>
+          <p:cNvPicPr>
+            <a:picLocks noChangeAspect="1"/>
+          </p:cNvPicPr>
+          <p:nvPr/>
+        </p:nvPicPr>
+        <p:blipFill>
+          <a:blip r:embed="rId2"/>
+          <a:stretch>
+            <a:fillRect/>
+          </a:stretch>
+        </p:blipFill>
+        <p:spPr>
+          <a:xfrm>
+            <a:off x="457200" y="3566160"/>
+            <a:ext cx="8229600" cy="365760"/>
+          </a:xfrm>
+          <a:prstGeom prst="rect">
+            <a:avLst/>
+          </a:prstGeom>
+        </p:spPr>
+      </p:pic>
     </p:spTree>
   </p:cSld>
   <p:clrMapOvr>
@@ -3653,7 +4135,7 @@
                   <a:srgbClr val="22282E"/>
                 </a:solidFill>
               </a:rPr>
-              <a:t>•  Entender quién ataca, por qué lo hace y cómo se estructura un ataque dirigido de principio a fin. Al terminar podrás clasificar a un adversario por sus capacidades y motivaciones, y descomponer un incidente en las fases de la Cyber Kill Chain para saber en qué punto detectarlo o cortarlo.</a:t>
+              <a:t>•  Entender quién ataca, por qué lo hace y cómo se estructura un ataque dirigido de principio a fin. La defensa eficaz no reacciona a golpes aislados: anticipa el comportamiento del adversario y decide…</a:t>
             </a:r>
           </a:p>
         </p:txBody>
@@ -3820,6 +4302,21 @@
               <a:t>•  Interpretar informes de threat intelligence con vocabulario correcto.</a:t>
             </a:r>
           </a:p>
+          <a:p>
+            <a:pPr>
+              <a:spcAft>
+                <a:spcPts val="600"/>
+              </a:spcAft>
+            </a:pPr>
+            <a:r>
+              <a:rPr sz="1500">
+                <a:solidFill>
+                  <a:srgbClr val="22282E"/>
+                </a:solidFill>
+              </a:rPr>
+              <a:t>•  Distinguir indicadores de compromiso (IoC) de tácticas, técnicas y procedimientos (TTP) y su distinta caducidad.</a:t>
+            </a:r>
+          </a:p>
         </p:txBody>
       </p:sp>
     </p:spTree>
@@ -4047,7 +4544,7 @@
                   <a:srgbClr val="0B3D2E"/>
                 </a:solidFill>
               </a:rPr>
-              <a:t>📖 Definiciones y características</a:t>
+              <a:t>🧠 Explicación en profundidad</a:t>
             </a:r>
           </a:p>
         </p:txBody>
@@ -4085,82 +4582,97 @@
                   <a:srgbClr val="22282E"/>
                 </a:solidFill>
               </a:rPr>
-              <a:t>•  Actor de amenaza: entidad (persona o grupo) que puede causar daño. Se caracteriza por su capacidad, recursos y motivación.</a:t>
-            </a:r>
-          </a:p>
-          <a:p>
-            <a:pPr>
-              <a:spcAft>
-                <a:spcPts val="600"/>
-              </a:spcAft>
-            </a:pPr>
-            <a:r>
-              <a:rPr sz="1500">
-                <a:solidFill>
-                  <a:srgbClr val="22282E"/>
-                </a:solidFill>
-              </a:rPr>
-              <a:t>•  APT (Advanced Persistent Threat): adversario sofisticado y persistente, normalmente estatal o crimen organizado. Clave: prioriza el sigilo y la permanencia sobre la rapidez.</a:t>
-            </a:r>
-          </a:p>
-          <a:p>
-            <a:pPr>
-              <a:spcAft>
-                <a:spcPts val="600"/>
-              </a:spcAft>
-            </a:pPr>
-            <a:r>
-              <a:rPr sz="1500">
-                <a:solidFill>
-                  <a:srgbClr val="22282E"/>
-                </a:solidFill>
-              </a:rPr>
-              <a:t>•  Cyber Kill Chain: modelo de 7 fases (reconocimiento → armamento → entrega → explotación → instalación → C2 → acciones sobre objetivos). Clave: romper una sola fase frustra el ataque.</a:t>
-            </a:r>
-          </a:p>
-          <a:p>
-            <a:pPr>
-              <a:spcAft>
-                <a:spcPts val="600"/>
-              </a:spcAft>
-            </a:pPr>
-            <a:r>
-              <a:rPr sz="1500">
-                <a:solidFill>
-                  <a:srgbClr val="22282E"/>
-                </a:solidFill>
-              </a:rPr>
-              <a:t>•  IoC (Indicator of Compromise): evidencia concreta de un ataque (hash, IP, dominio). Clave: efímero, fácil de rotar por el atacante.</a:t>
-            </a:r>
-          </a:p>
-          <a:p>
-            <a:pPr>
-              <a:spcAft>
-                <a:spcPts val="600"/>
-              </a:spcAft>
-            </a:pPr>
-            <a:r>
-              <a:rPr sz="1500">
-                <a:solidFill>
-                  <a:srgbClr val="22282E"/>
-                </a:solidFill>
-              </a:rPr>
-              <a:t>•  TTP (Tácticas, Técnicas y Procedimientos): cómo opera un adversario. Clave: más estable que los IoC, base de la caza de amenazas.</a:t>
-            </a:r>
-          </a:p>
-          <a:p>
-            <a:pPr>
-              <a:spcAft>
-                <a:spcPts val="600"/>
-              </a:spcAft>
-            </a:pPr>
-            <a:r>
-              <a:rPr sz="1500">
-                <a:solidFill>
-                  <a:srgbClr val="22282E"/>
-                </a:solidFill>
-              </a:rPr>
-              <a:t>•  Ransomware como servicio (RaaS): modelo de negocio donde operadores alquilan el malware a afiliados. Clave: profesionaliza y escala el cibercrimen.</a:t>
+              <a:t>•  No todos los adversarios son iguales, y tratarlos como si lo fueran lleva a gastar mal el presupuesto de defensa. Conviene situar a cada actor en dos ejes independientes: su capacidad (recursos…</a:t>
+            </a:r>
+          </a:p>
+          <a:p>
+            <a:pPr>
+              <a:spcAft>
+                <a:spcPts val="600"/>
+              </a:spcAft>
+            </a:pPr>
+            <a:r>
+              <a:rPr sz="1500">
+                <a:solidFill>
+                  <a:srgbClr val="22282E"/>
+                </a:solidFill>
+              </a:rPr>
+              <a:t>•  Lockheed Martin propuso en 2011 un modelo que describe un intrusion dirigido como una cadena de siete fases encadenadas, la Cyber Kill Chain. Su valor no es descriptivo sino operativo: si un ataque…</a:t>
+            </a:r>
+          </a:p>
+          <a:p>
+            <a:pPr>
+              <a:spcAft>
+                <a:spcPts val="600"/>
+              </a:spcAft>
+            </a:pPr>
+            <a:r>
+              <a:rPr sz="1500">
+                <a:solidFill>
+                  <a:srgbClr val="22282E"/>
+                </a:solidFill>
+              </a:rPr>
+              <a:t>•  Conviene tomar la cadena como guía, no como dogma. Los ataques modernos iteran, saltan fases y a veces empiezan comprando un acceso ya existente a un initial access broker, saltándose el…</a:t>
+            </a:r>
+          </a:p>
+          <a:p>
+            <a:pPr>
+              <a:spcAft>
+                <a:spcPts val="600"/>
+              </a:spcAft>
+            </a:pPr>
+            <a:r>
+              <a:rPr sz="1500">
+                <a:solidFill>
+                  <a:srgbClr val="22282E"/>
+                </a:solidFill>
+              </a:rPr>
+              <a:t>•  El ransomware dejó de ser un programa que cifra archivos para convertirse en un ecosistema económico. El modelo RaaS (Ransomware as a Service) separa a quien desarrolla el malware de quien lo…</a:t>
+            </a:r>
+          </a:p>
+          <a:p>
+            <a:pPr>
+              <a:spcAft>
+                <a:spcPts val="600"/>
+              </a:spcAft>
+            </a:pPr>
+            <a:r>
+              <a:rPr sz="1500">
+                <a:solidFill>
+                  <a:srgbClr val="22282E"/>
+                </a:solidFill>
+              </a:rPr>
+              <a:t>•  Al consumir threat intelligence es capital distinguir dos niveles de información. Un IoC (indicador de compromiso) es una evidencia concreta y atómica: un hash de un fichero malicioso, una dirección…</a:t>
+            </a:r>
+          </a:p>
+          <a:p>
+            <a:pPr>
+              <a:spcAft>
+                <a:spcPts val="600"/>
+              </a:spcAft>
+            </a:pPr>
+            <a:r>
+              <a:rPr sz="1500">
+                <a:solidFill>
+                  <a:srgbClr val="22282E"/>
+                </a:solidFill>
+              </a:rPr>
+              <a:t>•  El poder combinado de la Kill Chain y la distinción IoC/TTP es que permite asignar cada control defensivo a la fase donde actúa. La tabla siguiente ilustra el mapeo, que después construirás tú mismo…</a:t>
+            </a:r>
+          </a:p>
+          <a:p>
+            <a:pPr>
+              <a:spcAft>
+                <a:spcPts val="600"/>
+              </a:spcAft>
+            </a:pPr>
+            <a:r>
+              <a:rPr sz="1500">
+                <a:solidFill>
+                  <a:srgbClr val="22282E"/>
+                </a:solidFill>
+              </a:rPr>
+              <a:t>•  Fase de la Kill Chain — Señal observable</a:t>
             </a:r>
           </a:p>
         </p:txBody>
@@ -4211,7 +4723,7 @@
                   <a:srgbClr val="0B3D2E"/>
                 </a:solidFill>
               </a:rPr>
-              <a:t>🧰 Herramientas y preparación</a:t>
+              <a:t>📖 Definiciones y características</a:t>
             </a:r>
           </a:p>
         </p:txBody>
@@ -4249,7 +4761,97 @@
                   <a:srgbClr val="22282E"/>
                 </a:solidFill>
               </a:rPr>
-              <a:t>•  Consulta fuentes reales de threat intelligence: MITRE ATT&amp;CK (&lt;https://attack.mitre.org&gt;), el catálogo CISA KEV de vulnerabilidades explotadas, y los informes anuales públicos (Verizon DBIR, ENISA Threat Landscape). Crea una cuenta gratuita en AlienVault OTX o revisa feeds abiertos para ver IoC reales. No se requiere laboratorio ofensivo.</a:t>
+              <a:t>•  Actor de amenaza: entidad (persona o grupo) capaz de causar daño. Se caracteriza por su capacidad, sus recursos y su motivación, tres factores que deben evaluarse por separado para dimensionar la…</a:t>
+            </a:r>
+          </a:p>
+          <a:p>
+            <a:pPr>
+              <a:spcAft>
+                <a:spcPts val="600"/>
+              </a:spcAft>
+            </a:pPr>
+            <a:r>
+              <a:rPr sz="1500">
+                <a:solidFill>
+                  <a:srgbClr val="22282E"/>
+                </a:solidFill>
+              </a:rPr>
+              <a:t>•  APT (Advanced Persistent Threat): adversario sofisticado y persistente, normalmente estatal o de crimen organizado de alto nivel. Su rasgo distintivo es que prioriza el sigilo y la permanencia…</a:t>
+            </a:r>
+          </a:p>
+          <a:p>
+            <a:pPr>
+              <a:spcAft>
+                <a:spcPts val="600"/>
+              </a:spcAft>
+            </a:pPr>
+            <a:r>
+              <a:rPr sz="1500">
+                <a:solidFill>
+                  <a:srgbClr val="22282E"/>
+                </a:solidFill>
+              </a:rPr>
+              <a:t>•  Cyber Kill Chain: modelo de siete fases (reconocimiento, armamento, entrega, explotación, instalación, C2 y acciones sobre objetivos). Su utilidad es que romper una sola fase frustra el ataque…</a:t>
+            </a:r>
+          </a:p>
+          <a:p>
+            <a:pPr>
+              <a:spcAft>
+                <a:spcPts val="600"/>
+              </a:spcAft>
+            </a:pPr>
+            <a:r>
+              <a:rPr sz="1500">
+                <a:solidFill>
+                  <a:srgbClr val="22282E"/>
+                </a:solidFill>
+              </a:rPr>
+              <a:t>•  Reconocimiento: fase inicial en la que el atacante recopila información sobre la víctima (OSINT, escaneos) para preparar el ataque. Reducir la exposición pública encarece esta fase.</a:t>
+            </a:r>
+          </a:p>
+          <a:p>
+            <a:pPr>
+              <a:spcAft>
+                <a:spcPts val="600"/>
+              </a:spcAft>
+            </a:pPr>
+            <a:r>
+              <a:rPr sz="1500">
+                <a:solidFill>
+                  <a:srgbClr val="22282E"/>
+                </a:solidFill>
+              </a:rPr>
+              <a:t>•  Mando y control (C2): canal por el que un implante recibe órdenes de la infraestructura del atacante. Cortar la salida de red es uno de los controles más efectivos contra esta fase.</a:t>
+            </a:r>
+          </a:p>
+          <a:p>
+            <a:pPr>
+              <a:spcAft>
+                <a:spcPts val="600"/>
+              </a:spcAft>
+            </a:pPr>
+            <a:r>
+              <a:rPr sz="1500">
+                <a:solidFill>
+                  <a:srgbClr val="22282E"/>
+                </a:solidFill>
+              </a:rPr>
+              <a:t>•  IoC (Indicator of Compromise): evidencia concreta y atómica de un ataque (hash, IP, dominio). Es fácil de bloquear pero también trivial de rotar por el atacante, por lo que caduca rápido.</a:t>
+            </a:r>
+          </a:p>
+          <a:p>
+            <a:pPr>
+              <a:spcAft>
+                <a:spcPts val="600"/>
+              </a:spcAft>
+            </a:pPr>
+            <a:r>
+              <a:rPr sz="1500">
+                <a:solidFill>
+                  <a:srgbClr val="22282E"/>
+                </a:solidFill>
+              </a:rPr>
+              <a:t>•  TTP (Tácticas, Técnicas y Procedimientos): descripción de cómo opera un adversario. Es más estable que los IoC y constituye la base de la caza de amenazas y de una detección duradera.</a:t>
             </a:r>
           </a:p>
         </p:txBody>
@@ -4300,7 +4902,7 @@
                   <a:srgbClr val="0B3D2E"/>
                 </a:solidFill>
               </a:rPr>
-              <a:t>🧪 Laboratorio guiado (ejercicio aplicado)</a:t>
+              <a:t>📔 Glosario</a:t>
             </a:r>
           </a:p>
         </p:txBody>
@@ -4338,82 +4940,97 @@
                   <a:srgbClr val="22282E"/>
                 </a:solidFill>
               </a:rPr>
-              <a:t>•  Elige un incidente público bien documentado (por ejemplo, un caso de ransomware o de compromiso de cadena de suministro descrito por CISA).</a:t>
-            </a:r>
-          </a:p>
-          <a:p>
-            <a:pPr>
-              <a:spcAft>
-                <a:spcPts val="600"/>
-              </a:spcAft>
-            </a:pPr>
-            <a:r>
-              <a:rPr sz="1500">
-                <a:solidFill>
-                  <a:srgbClr val="22282E"/>
-                </a:solidFill>
-              </a:rPr>
-              <a:t>•  Mapea la Kill Chain: para cada una de las 7 fases, escribe qué hizo el atacante en ese incidente. Si falta información, márcalo como "desconocido".</a:t>
-            </a:r>
-          </a:p>
-          <a:p>
-            <a:pPr>
-              <a:spcAft>
-                <a:spcPts val="600"/>
-              </a:spcAft>
-            </a:pPr>
-            <a:r>
-              <a:rPr sz="1500">
-                <a:solidFill>
-                  <a:srgbClr val="22282E"/>
-                </a:solidFill>
-              </a:rPr>
-              <a:t>•  Perfil del actor: clasifica al adversario (tipo, motivación probable, nivel de recursos). Justifica con evidencia del informe.</a:t>
-            </a:r>
-          </a:p>
-          <a:p>
-            <a:pPr>
-              <a:spcAft>
-                <a:spcPts val="600"/>
-              </a:spcAft>
-            </a:pPr>
-            <a:r>
-              <a:rPr sz="1500">
-                <a:solidFill>
-                  <a:srgbClr val="22282E"/>
-                </a:solidFill>
-              </a:rPr>
-              <a:t>•  Controles por fase: junto a cada fase, escribe un control defensivo que la habría cortado (p. ej., filtrado de correo en "entrega", EDR en "instalación", bloqueo de salida en "C2").</a:t>
-            </a:r>
-          </a:p>
-          <a:p>
-            <a:pPr>
-              <a:spcAft>
-                <a:spcPts val="600"/>
-              </a:spcAft>
-            </a:pPr>
-            <a:r>
-              <a:rPr sz="1500">
-                <a:solidFill>
-                  <a:srgbClr val="22282E"/>
-                </a:solidFill>
-              </a:rPr>
-              <a:t>•  IoC vs. TTP: extrae del informe 3 IoC y 3 TTP. Reflexiona: ¿cuáles caducan antes?</a:t>
-            </a:r>
-          </a:p>
-          <a:p>
-            <a:pPr>
-              <a:spcAft>
-                <a:spcPts val="600"/>
-              </a:spcAft>
-            </a:pPr>
-            <a:r>
-              <a:rPr sz="1500">
-                <a:solidFill>
-                  <a:srgbClr val="22282E"/>
-                </a:solidFill>
-              </a:rPr>
-              <a:t>•  Correlación ATT&amp;CK: identifica al menos 3 técnicas de MITRE ATT&amp;CK presentes y anota sus IDs (formato Txxxx).</a:t>
+              <a:t>•  Término — Definición concisa</a:t>
+            </a:r>
+          </a:p>
+          <a:p>
+            <a:pPr>
+              <a:spcAft>
+                <a:spcPts val="600"/>
+              </a:spcAft>
+            </a:pPr>
+            <a:r>
+              <a:rPr sz="1500">
+                <a:solidFill>
+                  <a:srgbClr val="22282E"/>
+                </a:solidFill>
+              </a:rPr>
+              <a:t>•  APT — Advanced Persistent Threat: adversario sofisticado, persistente y con recursos</a:t>
+            </a:r>
+          </a:p>
+          <a:p>
+            <a:pPr>
+              <a:spcAft>
+                <a:spcPts val="600"/>
+              </a:spcAft>
+            </a:pPr>
+            <a:r>
+              <a:rPr sz="1500">
+                <a:solidFill>
+                  <a:srgbClr val="22282E"/>
+                </a:solidFill>
+              </a:rPr>
+              <a:t>•  Kill Chain — Modelo de 7 fases de un ataque dirigido de Lockheed Martin</a:t>
+            </a:r>
+          </a:p>
+          <a:p>
+            <a:pPr>
+              <a:spcAft>
+                <a:spcPts val="600"/>
+              </a:spcAft>
+            </a:pPr>
+            <a:r>
+              <a:rPr sz="1500">
+                <a:solidFill>
+                  <a:srgbClr val="22282E"/>
+                </a:solidFill>
+              </a:rPr>
+              <a:t>•  C2 / C&amp;C — Command and Control: canal de órdenes entre implante y atacante</a:t>
+            </a:r>
+          </a:p>
+          <a:p>
+            <a:pPr>
+              <a:spcAft>
+                <a:spcPts val="600"/>
+              </a:spcAft>
+            </a:pPr>
+            <a:r>
+              <a:rPr sz="1500">
+                <a:solidFill>
+                  <a:srgbClr val="22282E"/>
+                </a:solidFill>
+              </a:rPr>
+              <a:t>•  IoC — Indicator of Compromise: evidencia atómica de un ataque</a:t>
+            </a:r>
+          </a:p>
+          <a:p>
+            <a:pPr>
+              <a:spcAft>
+                <a:spcPts val="600"/>
+              </a:spcAft>
+            </a:pPr>
+            <a:r>
+              <a:rPr sz="1500">
+                <a:solidFill>
+                  <a:srgbClr val="22282E"/>
+                </a:solidFill>
+              </a:rPr>
+              <a:t>•  TTP — Tácticas, Técnicas y Procedimientos: comportamiento del adversario</a:t>
+            </a:r>
+          </a:p>
+          <a:p>
+            <a:pPr>
+              <a:spcAft>
+                <a:spcPts val="600"/>
+              </a:spcAft>
+            </a:pPr>
+            <a:r>
+              <a:rPr sz="1500">
+                <a:solidFill>
+                  <a:srgbClr val="22282E"/>
+                </a:solidFill>
+              </a:rPr>
+              <a:t>•  RaaS — Ransomware as a Service: modelo de alquiler del malware</a:t>
             </a:r>
           </a:p>
         </p:txBody>
@@ -4464,7 +5081,7 @@
                   <a:srgbClr val="0B3D2E"/>
                 </a:solidFill>
               </a:rPr>
-              <a:t>✍️ Ejercicios</a:t>
+              <a:t>🧰 Herramientas y preparación</a:t>
             </a:r>
           </a:p>
         </p:txBody>
@@ -4502,82 +5119,7 @@
                   <a:srgbClr val="22282E"/>
                 </a:solidFill>
               </a:rPr>
-              <a:t>•  Ordena de menor a mayor sofisticación: hacktivista, script kiddie, APT estatal, insider malicioso.</a:t>
-            </a:r>
-          </a:p>
-          <a:p>
-            <a:pPr>
-              <a:spcAft>
-                <a:spcPts val="600"/>
-              </a:spcAft>
-            </a:pPr>
-            <a:r>
-              <a:rPr sz="1500">
-                <a:solidFill>
-                  <a:srgbClr val="22282E"/>
-                </a:solidFill>
-              </a:rPr>
-              <a:t>•  Explica por qué "romper la cadena" en la fase de entrega es más barato que hacerlo en "acciones sobre objetivos".</a:t>
-            </a:r>
-          </a:p>
-          <a:p>
-            <a:pPr>
-              <a:spcAft>
-                <a:spcPts val="600"/>
-              </a:spcAft>
-            </a:pPr>
-            <a:r>
-              <a:rPr sz="1500">
-                <a:solidFill>
-                  <a:srgbClr val="22282E"/>
-                </a:solidFill>
-              </a:rPr>
-              <a:t>•  Da un ejemplo de IoC y uno de TTP para una campaña de phishing.</a:t>
-            </a:r>
-          </a:p>
-          <a:p>
-            <a:pPr>
-              <a:spcAft>
-                <a:spcPts val="600"/>
-              </a:spcAft>
-            </a:pPr>
-            <a:r>
-              <a:rPr sz="1500">
-                <a:solidFill>
-                  <a:srgbClr val="22282E"/>
-                </a:solidFill>
-              </a:rPr>
-              <a:t>•  ¿Qué motivación tiene un grupo de ransomware? ¿Y una APT estatal? Contrasta objetivos.</a:t>
-            </a:r>
-          </a:p>
-          <a:p>
-            <a:pPr>
-              <a:spcAft>
-                <a:spcPts val="600"/>
-              </a:spcAft>
-            </a:pPr>
-            <a:r>
-              <a:rPr sz="1500">
-                <a:solidFill>
-                  <a:srgbClr val="22282E"/>
-                </a:solidFill>
-              </a:rPr>
-              <a:t>•  Investiga un grupo APT documentado en ATT&amp;CK y resume sus TTP principales.</a:t>
-            </a:r>
-          </a:p>
-          <a:p>
-            <a:pPr>
-              <a:spcAft>
-                <a:spcPts val="600"/>
-              </a:spcAft>
-            </a:pPr>
-            <a:r>
-              <a:rPr sz="1500">
-                <a:solidFill>
-                  <a:srgbClr val="22282E"/>
-                </a:solidFill>
-              </a:rPr>
-              <a:t>•  Diseña una tabla de detección: fase de la Kill Chain → señal observable → herramienta que la capta.</a:t>
+              <a:t>•  Consulta fuentes reales de threat intelligence: la matriz de MITRE ATT&amp;CK (&lt;https://attack.mitre.org&gt;), el catálogo CISA KEV de vulnerabilidades explotadas activamente…</a:t>
             </a:r>
           </a:p>
         </p:txBody>
@@ -4628,7 +5170,7 @@
                   <a:srgbClr val="0B3D2E"/>
                 </a:solidFill>
               </a:rPr>
-              <a:t>📝 Reto verificable</a:t>
+              <a:t>🧪 Laboratorio guiado</a:t>
             </a:r>
           </a:p>
         </p:txBody>
@@ -4666,22 +5208,82 @@
                   <a:srgbClr val="22282E"/>
                 </a:solidFill>
               </a:rPr>
-              <a:t>•  Elabora un informe de una página tipo threat profile sobre un actor o campaña real: incluye clasificación del actor, mapeo completo de la Kill Chain, al menos 5 técnicas ATT&amp;CK con sus IDs, y una recomendación defensiva por cada fase.</a:t>
-            </a:r>
-          </a:p>
-          <a:p>
-            <a:pPr>
-              <a:spcAft>
-                <a:spcPts val="600"/>
-              </a:spcAft>
-            </a:pPr>
-            <a:r>
-              <a:rPr sz="1500">
-                <a:solidFill>
-                  <a:srgbClr val="22282E"/>
-                </a:solidFill>
-              </a:rPr>
-              <a:t>•  Criterio de aceptación: cada técnica citada existe en la matriz oficial de ATT&amp;CK (ID verificable), y cada fase de la Kill Chain tiene al menos un control defensivo asociado. Un compañero debe poder validar los IDs contra attack.mitre.org.</a:t>
+              <a:t>•  Elige un incidente público bien documentado (por ejemplo, un caso de ransomware o de compromiso de la cadena de suministro descrito en un aviso de CISA).</a:t>
+            </a:r>
+          </a:p>
+          <a:p>
+            <a:pPr>
+              <a:spcAft>
+                <a:spcPts val="600"/>
+              </a:spcAft>
+            </a:pPr>
+            <a:r>
+              <a:rPr sz="1500">
+                <a:solidFill>
+                  <a:srgbClr val="22282E"/>
+                </a:solidFill>
+              </a:rPr>
+              <a:t>•  Mapea la Kill Chain: para cada una de las 7 fases, escribe qué hizo el atacante en ese incidente. Si falta información, márcalo explícitamente como "desconocido" en lugar de inventarlo.</a:t>
+            </a:r>
+          </a:p>
+          <a:p>
+            <a:pPr>
+              <a:spcAft>
+                <a:spcPts val="600"/>
+              </a:spcAft>
+            </a:pPr>
+            <a:r>
+              <a:rPr sz="1500">
+                <a:solidFill>
+                  <a:srgbClr val="22282E"/>
+                </a:solidFill>
+              </a:rPr>
+              <a:t>•  Perfil del actor: clasifica al adversario por tipo, motivación probable y nivel de recursos, y sitúalo en los dos ejes (capacidad y motivación). Justifica con evidencia del informe.</a:t>
+            </a:r>
+          </a:p>
+          <a:p>
+            <a:pPr>
+              <a:spcAft>
+                <a:spcPts val="600"/>
+              </a:spcAft>
+            </a:pPr>
+            <a:r>
+              <a:rPr sz="1500">
+                <a:solidFill>
+                  <a:srgbClr val="22282E"/>
+                </a:solidFill>
+              </a:rPr>
+              <a:t>•  Controles por fase: junto a cada fase, escribe un control defensivo que la habría cortado (filtrado de correo en "entrega", EDR en "instalación", bloqueo de salida en "C2").</a:t>
+            </a:r>
+          </a:p>
+          <a:p>
+            <a:pPr>
+              <a:spcAft>
+                <a:spcPts val="600"/>
+              </a:spcAft>
+            </a:pPr>
+            <a:r>
+              <a:rPr sz="1500">
+                <a:solidFill>
+                  <a:srgbClr val="22282E"/>
+                </a:solidFill>
+              </a:rPr>
+              <a:t>•  IoC vs. TTP: extrae del informe 3 IoC y 3 TTP. Razona cuáles caducan antes y por qué, situándolos en la pirámide del dolor.</a:t>
+            </a:r>
+          </a:p>
+          <a:p>
+            <a:pPr>
+              <a:spcAft>
+                <a:spcPts val="600"/>
+              </a:spcAft>
+            </a:pPr>
+            <a:r>
+              <a:rPr sz="1500">
+                <a:solidFill>
+                  <a:srgbClr val="22282E"/>
+                </a:solidFill>
+              </a:rPr>
+              <a:t>•  Correlación con ATT&amp;CK: identifica al menos 3 técnicas de MITRE ATT&amp;CK presentes en el incidente y anota sus IDs (formato Txxxx), verificándolos contra el sitio oficial.</a:t>
             </a:r>
           </a:p>
         </p:txBody>
